--- a/template/template.pptx
+++ b/template/template.pptx
@@ -16,7 +16,7 @@
   <p:notesSz cx="6858000" cy="9144000"/>
   <p:embeddedFontLst>
     <p:embeddedFont>
-      <p:font typeface="Play"/>
+      <p:font typeface="Play" pitchFamily="2" charset="0"/>
       <p:regular r:id="rId6"/>
       <p:bold r:id="rId7"/>
     </p:embeddedFont>
@@ -13563,6 +13563,66 @@
           </a:ln>
         </p:spPr>
       </p:pic>
+      <p:sp>
+        <p:nvSpPr>
+          <p:cNvPr id="2" name="TextBox 1">
+            <a:extLst>
+              <a:ext uri="{FF2B5EF4-FFF2-40B4-BE49-F238E27FC236}">
+                <a16:creationId xmlns:a16="http://schemas.microsoft.com/office/drawing/2014/main" id="{EDF36741-C509-DBE3-6F92-BE0EFFBD63F4}"/>
+              </a:ext>
+            </a:extLst>
+          </p:cNvPr>
+          <p:cNvSpPr txBox="1"/>
+          <p:nvPr/>
+        </p:nvSpPr>
+        <p:spPr>
+          <a:xfrm>
+            <a:off x="152399" y="6433456"/>
+            <a:ext cx="7146471" cy="307777"/>
+          </a:xfrm>
+          <a:prstGeom prst="rect">
+            <a:avLst/>
+          </a:prstGeom>
+          <a:noFill/>
+        </p:spPr>
+        <p:txBody>
+          <a:bodyPr wrap="square">
+            <a:spAutoFit/>
+          </a:bodyPr>
+          <a:lstStyle/>
+          <a:p>
+            <a:r>
+              <a:rPr lang="en-US" dirty="0">
+                <a:solidFill>
+                  <a:schemeClr val="bg1"/>
+                </a:solidFill>
+              </a:rPr>
+              <a:t>@ </a:t>
+            </a:r>
+            <a:r>
+              <a:rPr lang="ru-RU" dirty="0">
+                <a:solidFill>
+                  <a:schemeClr val="bg1"/>
+                </a:solidFill>
+              </a:rPr>
+              <a:t>подготовлено совместно с </a:t>
+            </a:r>
+            <a:r>
+              <a:rPr lang="en-US" dirty="0" err="1">
+                <a:solidFill>
+                  <a:schemeClr val="bg1"/>
+                </a:solidFill>
+              </a:rPr>
+              <a:t>GigaChat</a:t>
+            </a:r>
+            <a:endParaRPr dirty="0">
+              <a:solidFill>
+                <a:schemeClr val="bg1"/>
+              </a:solidFill>
+            </a:endParaRPr>
+          </a:p>
+        </p:txBody>
+      </p:sp>
     </p:spTree>
   </p:cSld>
   <p:clrMapOvr>
